--- a/00-introduction/introduction-slides.pptx
+++ b/00-introduction/introduction-slides.pptx
@@ -145,7 +145,7 @@
       </p15:sldGuideLst>
     </p:ext>
     <p:ext uri="GoogleSlidesCustomDataVersion2">
-      <go:slidesCustomData xmlns="" xmlns:mc="http://schemas.openxmlformats.org/markup-compatibility/2006" xmlns:mv="urn:schemas-microsoft-com:mac:vml" xmlns:c="http://schemas.openxmlformats.org/drawingml/2006/chart" xmlns:dgm="http://schemas.openxmlformats.org/drawingml/2006/diagram" xmlns:o="urn:schemas-microsoft-com:office:office" xmlns:v="urn:schemas-microsoft-com:vml" xmlns:pvml="urn:schemas-microsoft-com:office:powerpoint" xmlns:com="http://schemas.openxmlformats.org/drawingml/2006/compatibility" xmlns:p14="http://schemas.microsoft.com/office/powerpoint/2010/main" xmlns:p15="http://schemas.microsoft.com/office/powerpoint/2012/main" xmlns:ahyp="http://schemas.microsoft.com/office/drawing/2018/hyperlinkcolor" xmlns:go="http://customooxmlschemas.google.com/" r:id="rId31" roundtripDataSignature="AMtx7mgec6XkJrYLMqIfmNf7DzA/BRS6YA=="/>
+      <go:slidesCustomData xmlns:go="http://customooxmlschemas.google.com/" xmlns:ahyp="http://schemas.microsoft.com/office/drawing/2018/hyperlinkcolor" xmlns:p15="http://schemas.microsoft.com/office/powerpoint/2012/main" xmlns:p14="http://schemas.microsoft.com/office/powerpoint/2010/main" xmlns:com="http://schemas.openxmlformats.org/drawingml/2006/compatibility" xmlns:pvml="urn:schemas-microsoft-com:office:powerpoint" xmlns:v="urn:schemas-microsoft-com:vml" xmlns:o="urn:schemas-microsoft-com:office:office" xmlns:dgm="http://schemas.openxmlformats.org/drawingml/2006/diagram" xmlns:c="http://schemas.openxmlformats.org/drawingml/2006/chart" xmlns:mv="urn:schemas-microsoft-com:mac:vml" xmlns:mc="http://schemas.openxmlformats.org/markup-compatibility/2006" xmlns="" r:id="rId31" roundtripDataSignature="AMtx7mgec6XkJrYLMqIfmNf7DzA/BRS6YA=="/>
     </p:ext>
   </p:extLst>
 </p:presentation>
@@ -10468,7 +10468,7 @@
         <p:fade/>
       </p:transition>
     </mc:Choice>
-    <mc:Fallback xmlns="" xmlns:mv="urn:schemas-microsoft-com:mac:vml" xmlns:c="http://schemas.openxmlformats.org/drawingml/2006/chart" xmlns:dgm="http://schemas.openxmlformats.org/drawingml/2006/diagram" xmlns:o="urn:schemas-microsoft-com:office:office" xmlns:v="urn:schemas-microsoft-com:vml" xmlns:pvml="urn:schemas-microsoft-com:office:powerpoint" xmlns:com="http://schemas.openxmlformats.org/drawingml/2006/compatibility" xmlns:p15="http://schemas.microsoft.com/office/powerpoint/2012/main" xmlns:ahyp="http://schemas.microsoft.com/office/drawing/2018/hyperlinkcolor">
+    <mc:Fallback xmlns:ahyp="http://schemas.microsoft.com/office/drawing/2018/hyperlinkcolor" xmlns:p15="http://schemas.microsoft.com/office/powerpoint/2012/main" xmlns:com="http://schemas.openxmlformats.org/drawingml/2006/compatibility" xmlns:pvml="urn:schemas-microsoft-com:office:powerpoint" xmlns:v="urn:schemas-microsoft-com:vml" xmlns:o="urn:schemas-microsoft-com:office:office" xmlns:dgm="http://schemas.openxmlformats.org/drawingml/2006/diagram" xmlns:c="http://schemas.openxmlformats.org/drawingml/2006/chart" xmlns:mv="urn:schemas-microsoft-com:mac:vml" xmlns="">
       <p:transition spd="slow">
         <p:fade/>
       </p:transition>
@@ -14167,7 +14167,7 @@
         <p:fade/>
       </p:transition>
     </mc:Choice>
-    <mc:Fallback xmlns="" xmlns:mv="urn:schemas-microsoft-com:mac:vml" xmlns:c="http://schemas.openxmlformats.org/drawingml/2006/chart" xmlns:dgm="http://schemas.openxmlformats.org/drawingml/2006/diagram" xmlns:o="urn:schemas-microsoft-com:office:office" xmlns:v="urn:schemas-microsoft-com:vml" xmlns:pvml="urn:schemas-microsoft-com:office:powerpoint" xmlns:com="http://schemas.openxmlformats.org/drawingml/2006/compatibility" xmlns:p15="http://schemas.microsoft.com/office/powerpoint/2012/main" xmlns:ahyp="http://schemas.microsoft.com/office/drawing/2018/hyperlinkcolor">
+    <mc:Fallback xmlns:ahyp="http://schemas.microsoft.com/office/drawing/2018/hyperlinkcolor" xmlns:p15="http://schemas.microsoft.com/office/powerpoint/2012/main" xmlns:com="http://schemas.openxmlformats.org/drawingml/2006/compatibility" xmlns:pvml="urn:schemas-microsoft-com:office:powerpoint" xmlns:v="urn:schemas-microsoft-com:vml" xmlns:o="urn:schemas-microsoft-com:office:office" xmlns:dgm="http://schemas.openxmlformats.org/drawingml/2006/diagram" xmlns:c="http://schemas.openxmlformats.org/drawingml/2006/chart" xmlns:mv="urn:schemas-microsoft-com:mac:vml" xmlns="">
       <p:transition spd="slow">
         <p:fade/>
       </p:transition>
@@ -15450,7 +15450,7 @@
                 <a:sym typeface="Arial"/>
                 <a:hlinkClick r:id="rId4"/>
               </a:rPr>
-              <a:t>התפרסמו מעל 27,000 אלגוריתמים חדשים</a:t>
+              <a:t>התפרסמו מעל 24,000 אלגוריתמים חדשים</a:t>
             </a:r>
             <a:r>
               <a:rPr lang="he-IL" sz="6000">
@@ -15481,7 +15481,7 @@
                 <a:cs typeface="Calibri" panose="020F0502020204030204" pitchFamily="34" charset="0"/>
                 <a:sym typeface="Arial"/>
               </a:rPr>
-              <a:t>מעל 70 אלגוריתמים חדשים ליום!</a:t>
+              <a:t>מעל 60 אלגוריתמים חדשים ליום!</a:t>
             </a:r>
             <a:endParaRPr lang="he-IL" sz="6000" dirty="0">
               <a:solidFill>
@@ -15644,7 +15644,7 @@
         <p:fade/>
       </p:transition>
     </mc:Choice>
-    <mc:Fallback xmlns="" xmlns:mv="urn:schemas-microsoft-com:mac:vml" xmlns:c="http://schemas.openxmlformats.org/drawingml/2006/chart" xmlns:dgm="http://schemas.openxmlformats.org/drawingml/2006/diagram" xmlns:o="urn:schemas-microsoft-com:office:office" xmlns:v="urn:schemas-microsoft-com:vml" xmlns:pvml="urn:schemas-microsoft-com:office:powerpoint" xmlns:com="http://schemas.openxmlformats.org/drawingml/2006/compatibility" xmlns:p15="http://schemas.microsoft.com/office/powerpoint/2012/main" xmlns:ahyp="http://schemas.microsoft.com/office/drawing/2018/hyperlinkcolor">
+    <mc:Fallback xmlns:ahyp="http://schemas.microsoft.com/office/drawing/2018/hyperlinkcolor" xmlns:p15="http://schemas.microsoft.com/office/powerpoint/2012/main" xmlns:com="http://schemas.openxmlformats.org/drawingml/2006/compatibility" xmlns:pvml="urn:schemas-microsoft-com:office:powerpoint" xmlns:v="urn:schemas-microsoft-com:vml" xmlns:o="urn:schemas-microsoft-com:office:office" xmlns:dgm="http://schemas.openxmlformats.org/drawingml/2006/diagram" xmlns:c="http://schemas.openxmlformats.org/drawingml/2006/chart" xmlns:mv="urn:schemas-microsoft-com:mac:vml" xmlns="">
       <p:transition spd="slow">
         <p:fade/>
       </p:transition>
@@ -16094,7 +16094,7 @@
         <p:fade/>
       </p:transition>
     </mc:Choice>
-    <mc:Fallback xmlns="" xmlns:mv="urn:schemas-microsoft-com:mac:vml" xmlns:c="http://schemas.openxmlformats.org/drawingml/2006/chart" xmlns:dgm="http://schemas.openxmlformats.org/drawingml/2006/diagram" xmlns:o="urn:schemas-microsoft-com:office:office" xmlns:v="urn:schemas-microsoft-com:vml" xmlns:pvml="urn:schemas-microsoft-com:office:powerpoint" xmlns:com="http://schemas.openxmlformats.org/drawingml/2006/compatibility" xmlns:p15="http://schemas.microsoft.com/office/powerpoint/2012/main" xmlns:ahyp="http://schemas.microsoft.com/office/drawing/2018/hyperlinkcolor">
+    <mc:Fallback xmlns:ahyp="http://schemas.microsoft.com/office/drawing/2018/hyperlinkcolor" xmlns:p15="http://schemas.microsoft.com/office/powerpoint/2012/main" xmlns:com="http://schemas.openxmlformats.org/drawingml/2006/compatibility" xmlns:pvml="urn:schemas-microsoft-com:office:powerpoint" xmlns:v="urn:schemas-microsoft-com:vml" xmlns:o="urn:schemas-microsoft-com:office:office" xmlns:dgm="http://schemas.openxmlformats.org/drawingml/2006/diagram" xmlns:c="http://schemas.openxmlformats.org/drawingml/2006/chart" xmlns:mv="urn:schemas-microsoft-com:mac:vml" xmlns="">
       <p:transition spd="slow">
         <p:fade/>
       </p:transition>
